--- a/unpruuf/presentations/export/unpruuf_Compliance_RO.pptx
+++ b/unpruuf/presentations/export/unpruuf_Compliance_RO.pptx
@@ -18,8 +18,10 @@
     <p:sldId id="266" r:id="rId18"/>
     <p:sldId id="267" r:id="rId19"/>
     <p:sldId id="268" r:id="rId20"/>
+    <p:sldId id="269" r:id="rId21"/>
+    <p:sldId id="270" r:id="rId22"/>
   </p:sldIdLst>
-  <p:sldSz cx="12192000" cy="6858000" type="screen4x3"/>
+  <p:sldSz cx="12191695" cy="6858000" type="screen4x3"/>
   <p:notesSz cx="6858000" cy="9144000"/>
   <p:defaultTextStyle>
     <a:defPPr>
@@ -514,7 +516,7 @@
           <a:lstStyle/>
           <a:p>
             <a:r>
-              <a:t>Mai multe canale înseamnă mai multe relee, fiecare cu propriul panou și propriile chei, de exemplu pe sedii sau departamente.</a:t>
+              <a:t>Mai multe canale înseamnă mai multe noduri, fiecare cu panou propriu și chei proprii, de exemplu pe locație sau departament.</a:t>
             </a:r>
           </a:p>
         </p:txBody>
@@ -584,7 +586,77 @@
           <a:lstStyle/>
           <a:p>
             <a:r>
-              <a:t>Singura excepție de la releu: codul de asociere, schimbat o singură dată la deschiderea cazului. După aceea totul trece prin releu, criptat cap la cap.</a:t>
+              <a:t>Nu există o cale directă între avertizor și responsabil: totul trece prin nodul organizației, criptat cap la cap. Avertizorul are nevoie doar de codul QR unic al organizației.</a:t>
+            </a:r>
+          </a:p>
+        </p:txBody>
+      </p:sp>
+      <p:sp>
+        <p:nvSpPr>
+          <p:cNvPr id="4" name="Slide Number Placeholder 3"/>
+          <p:cNvSpPr>
+            <a:spLocks noGrp="1"/>
+          </p:cNvSpPr>
+          <p:nvPr>
+            <p:ph type="sldNum" idx="5" sz="quarter"/>
+          </p:nvPr>
+        </p:nvSpPr>
+        <p:spPr/>
+      </p:sp>
+    </p:spTree>
+  </p:cSld>
+  <p:clrMapOvr>
+    <a:masterClrMapping/>
+  </p:clrMapOvr>
+</p:notes>
+</file>
+
+<file path=ppt/notesSlides/notesSlide3.xml><?xml version="1.0" encoding="utf-8"?>
+<p:notes xmlns:a="http://schemas.openxmlformats.org/drawingml/2006/main" xmlns:p="http://schemas.openxmlformats.org/presentationml/2006/main" xmlns:r="http://schemas.openxmlformats.org/officeDocument/2006/relationships">
+  <p:cSld>
+    <p:spTree>
+      <p:nvGrpSpPr>
+        <p:cNvPr id="1" name=""/>
+        <p:cNvGrpSpPr/>
+        <p:nvPr/>
+      </p:nvGrpSpPr>
+      <p:grpSpPr>
+        <a:xfrm>
+          <a:off x="0" y="0"/>
+          <a:ext cx="0" cy="0"/>
+          <a:chOff x="0" y="0"/>
+          <a:chExt cx="0" cy="0"/>
+        </a:xfrm>
+      </p:grpSpPr>
+      <p:sp>
+        <p:nvSpPr>
+          <p:cNvPr id="2" name="Slide Image Placeholder 1"/>
+          <p:cNvSpPr>
+            <a:spLocks noGrp="1"/>
+          </p:cNvSpPr>
+          <p:nvPr>
+            <p:ph type="sldImg" idx="2"/>
+          </p:nvPr>
+        </p:nvSpPr>
+        <p:spPr/>
+      </p:sp>
+      <p:sp>
+        <p:nvSpPr>
+          <p:cNvPr id="3" name="Notes Placeholder 2"/>
+          <p:cNvSpPr>
+            <a:spLocks noGrp="1"/>
+          </p:cNvSpPr>
+          <p:nvPr>
+            <p:ph type="body" idx="3" sz="quarter"/>
+          </p:nvPr>
+        </p:nvSpPr>
+        <p:spPr/>
+        <p:txBody>
+          <a:bodyPr/>
+          <a:lstStyle/>
+          <a:p>
+            <a:r>
+              <a:t>Schimbarea dispozitivului este o limită: cine pierde telefonul pierde și numerele de caz, dacă nu le-a notat.</a:t>
             </a:r>
           </a:p>
         </p:txBody>
@@ -3607,7 +3679,7 @@
         <p:spPr>
           <a:xfrm>
             <a:off x="0" y="0"/>
-            <a:ext cx="12192000" cy="6858000"/>
+            <a:ext cx="12191695" cy="6858000"/>
           </a:xfrm>
           <a:prstGeom prst="rect">
             <a:avLst/>
@@ -3634,7 +3706,7 @@
       <p:grpSpPr/>
       <p:pic>
         <p:nvPicPr>
-          <p:cNvPr id="2" name="Picture 1" descr="10-cadru-legal.png"/>
+          <p:cNvPr id="2" name="Picture 1" descr="10-panou.png"/>
           <p:cNvPicPr>
             <a:picLocks noChangeAspect="1"/>
           </p:cNvPicPr>
@@ -3649,7 +3721,7 @@
         <p:spPr>
           <a:xfrm>
             <a:off x="0" y="0"/>
-            <a:ext cx="12192000" cy="6858000"/>
+            <a:ext cx="12191695" cy="6858000"/>
           </a:xfrm>
           <a:prstGeom prst="rect">
             <a:avLst/>
@@ -3676,7 +3748,7 @@
       <p:grpSpPr/>
       <p:pic>
         <p:nvPicPr>
-          <p:cNvPr id="2" name="Picture 1" descr="11-instalare.png"/>
+          <p:cNvPr id="2" name="Picture 1" descr="11-doua-cai.png"/>
           <p:cNvPicPr>
             <a:picLocks noChangeAspect="1"/>
           </p:cNvPicPr>
@@ -3691,7 +3763,7 @@
         <p:spPr>
           <a:xfrm>
             <a:off x="0" y="0"/>
-            <a:ext cx="12192000" cy="6858000"/>
+            <a:ext cx="12191695" cy="6858000"/>
           </a:xfrm>
           <a:prstGeom prst="rect">
             <a:avLst/>
@@ -3718,7 +3790,7 @@
       <p:grpSpPr/>
       <p:pic>
         <p:nvPicPr>
-          <p:cNvPr id="2" name="Picture 1" descr="12-stadiu.png"/>
+          <p:cNvPr id="2" name="Picture 1" descr="12-cadru-legal.png"/>
           <p:cNvPicPr>
             <a:picLocks noChangeAspect="1"/>
           </p:cNvPicPr>
@@ -3733,7 +3805,7 @@
         <p:spPr>
           <a:xfrm>
             <a:off x="0" y="0"/>
-            <a:ext cx="12192000" cy="6858000"/>
+            <a:ext cx="12191695" cy="6858000"/>
           </a:xfrm>
           <a:prstGeom prst="rect">
             <a:avLst/>
@@ -3760,7 +3832,7 @@
       <p:grpSpPr/>
       <p:pic>
         <p:nvPicPr>
-          <p:cNvPr id="2" name="Picture 1" descr="13-pasi.png"/>
+          <p:cNvPr id="2" name="Picture 1" descr="13-instalare.png"/>
           <p:cNvPicPr>
             <a:picLocks noChangeAspect="1"/>
           </p:cNvPicPr>
@@ -3775,7 +3847,91 @@
         <p:spPr>
           <a:xfrm>
             <a:off x="0" y="0"/>
-            <a:ext cx="12192000" cy="6858000"/>
+            <a:ext cx="12191695" cy="6858000"/>
+          </a:xfrm>
+          <a:prstGeom prst="rect">
+            <a:avLst/>
+          </a:prstGeom>
+        </p:spPr>
+      </p:pic>
+    </p:spTree>
+  </p:cSld>
+  <p:clrMapOvr>
+    <a:masterClrMapping/>
+  </p:clrMapOvr>
+</p:sld>
+</file>
+
+<file path=ppt/slides/slide14.xml><?xml version="1.0" encoding="utf-8"?>
+<p:sld xmlns:a="http://schemas.openxmlformats.org/drawingml/2006/main" xmlns:p="http://schemas.openxmlformats.org/presentationml/2006/main" xmlns:r="http://schemas.openxmlformats.org/officeDocument/2006/relationships">
+  <p:cSld>
+    <p:spTree>
+      <p:nvGrpSpPr>
+        <p:cNvPr id="1" name=""/>
+        <p:cNvGrpSpPr/>
+        <p:nvPr/>
+      </p:nvGrpSpPr>
+      <p:grpSpPr/>
+      <p:pic>
+        <p:nvPicPr>
+          <p:cNvPr id="2" name="Picture 1" descr="14-stadiu.png"/>
+          <p:cNvPicPr>
+            <a:picLocks noChangeAspect="1"/>
+          </p:cNvPicPr>
+          <p:nvPr/>
+        </p:nvPicPr>
+        <p:blipFill>
+          <a:blip r:embed="rId2"/>
+          <a:stretch>
+            <a:fillRect/>
+          </a:stretch>
+        </p:blipFill>
+        <p:spPr>
+          <a:xfrm>
+            <a:off x="0" y="0"/>
+            <a:ext cx="12191695" cy="6858000"/>
+          </a:xfrm>
+          <a:prstGeom prst="rect">
+            <a:avLst/>
+          </a:prstGeom>
+        </p:spPr>
+      </p:pic>
+    </p:spTree>
+  </p:cSld>
+  <p:clrMapOvr>
+    <a:masterClrMapping/>
+  </p:clrMapOvr>
+</p:sld>
+</file>
+
+<file path=ppt/slides/slide15.xml><?xml version="1.0" encoding="utf-8"?>
+<p:sld xmlns:a="http://schemas.openxmlformats.org/drawingml/2006/main" xmlns:p="http://schemas.openxmlformats.org/presentationml/2006/main" xmlns:r="http://schemas.openxmlformats.org/officeDocument/2006/relationships">
+  <p:cSld>
+    <p:spTree>
+      <p:nvGrpSpPr>
+        <p:cNvPr id="1" name=""/>
+        <p:cNvGrpSpPr/>
+        <p:nvPr/>
+      </p:nvGrpSpPr>
+      <p:grpSpPr/>
+      <p:pic>
+        <p:nvPicPr>
+          <p:cNvPr id="2" name="Picture 1" descr="15-pasi.png"/>
+          <p:cNvPicPr>
+            <a:picLocks noChangeAspect="1"/>
+          </p:cNvPicPr>
+          <p:nvPr/>
+        </p:nvPicPr>
+        <p:blipFill>
+          <a:blip r:embed="rId2"/>
+          <a:stretch>
+            <a:fillRect/>
+          </a:stretch>
+        </p:blipFill>
+        <p:spPr>
+          <a:xfrm>
+            <a:off x="0" y="0"/>
+            <a:ext cx="12191695" cy="6858000"/>
           </a:xfrm>
           <a:prstGeom prst="rect">
             <a:avLst/>
@@ -3817,7 +3973,7 @@
         <p:spPr>
           <a:xfrm>
             <a:off x="0" y="0"/>
-            <a:ext cx="12192000" cy="6858000"/>
+            <a:ext cx="12191695" cy="6858000"/>
           </a:xfrm>
           <a:prstGeom prst="rect">
             <a:avLst/>
@@ -3859,7 +4015,7 @@
         <p:spPr>
           <a:xfrm>
             <a:off x="0" y="0"/>
-            <a:ext cx="12192000" cy="6858000"/>
+            <a:ext cx="12191695" cy="6858000"/>
           </a:xfrm>
           <a:prstGeom prst="rect">
             <a:avLst/>
@@ -3901,7 +4057,7 @@
         <p:spPr>
           <a:xfrm>
             <a:off x="0" y="0"/>
-            <a:ext cx="12192000" cy="6858000"/>
+            <a:ext cx="12191695" cy="6858000"/>
           </a:xfrm>
           <a:prstGeom prst="rect">
             <a:avLst/>
@@ -3943,7 +4099,7 @@
         <p:spPr>
           <a:xfrm>
             <a:off x="0" y="0"/>
-            <a:ext cx="12192000" cy="6858000"/>
+            <a:ext cx="12191695" cy="6858000"/>
           </a:xfrm>
           <a:prstGeom prst="rect">
             <a:avLst/>
@@ -3970,7 +4126,7 @@
       <p:grpSpPr/>
       <p:pic>
         <p:nvPicPr>
-          <p:cNvPr id="2" name="Picture 1" descr="06-nu-exista.png"/>
+          <p:cNvPr id="2" name="Picture 1" descr="06-qr-unic.png"/>
           <p:cNvPicPr>
             <a:picLocks noChangeAspect="1"/>
           </p:cNvPicPr>
@@ -3985,7 +4141,7 @@
         <p:spPr>
           <a:xfrm>
             <a:off x="0" y="0"/>
-            <a:ext cx="12192000" cy="6858000"/>
+            <a:ext cx="12191695" cy="6858000"/>
           </a:xfrm>
           <a:prstGeom prst="rect">
             <a:avLst/>
@@ -4012,7 +4168,7 @@
       <p:grpSpPr/>
       <p:pic>
         <p:nvPicPr>
-          <p:cNvPr id="2" name="Picture 1" descr="07-cine-vede.png"/>
+          <p:cNvPr id="2" name="Picture 1" descr="07-caz.png"/>
           <p:cNvPicPr>
             <a:picLocks noChangeAspect="1"/>
           </p:cNvPicPr>
@@ -4027,7 +4183,7 @@
         <p:spPr>
           <a:xfrm>
             <a:off x="0" y="0"/>
-            <a:ext cx="12192000" cy="6858000"/>
+            <a:ext cx="12191695" cy="6858000"/>
           </a:xfrm>
           <a:prstGeom prst="rect">
             <a:avLst/>
@@ -4054,7 +4210,7 @@
       <p:grpSpPr/>
       <p:pic>
         <p:nvPicPr>
-          <p:cNvPr id="2" name="Picture 1" descr="08-panou.png"/>
+          <p:cNvPr id="2" name="Picture 1" descr="08-nu-exista.png"/>
           <p:cNvPicPr>
             <a:picLocks noChangeAspect="1"/>
           </p:cNvPicPr>
@@ -4069,7 +4225,7 @@
         <p:spPr>
           <a:xfrm>
             <a:off x="0" y="0"/>
-            <a:ext cx="12192000" cy="6858000"/>
+            <a:ext cx="12191695" cy="6858000"/>
           </a:xfrm>
           <a:prstGeom prst="rect">
             <a:avLst/>
@@ -4096,7 +4252,7 @@
       <p:grpSpPr/>
       <p:pic>
         <p:nvPicPr>
-          <p:cNvPr id="2" name="Picture 1" descr="09-doua-cai.png"/>
+          <p:cNvPr id="2" name="Picture 1" descr="09-cine-vede.png"/>
           <p:cNvPicPr>
             <a:picLocks noChangeAspect="1"/>
           </p:cNvPicPr>
@@ -4111,7 +4267,7 @@
         <p:spPr>
           <a:xfrm>
             <a:off x="0" y="0"/>
-            <a:ext cx="12192000" cy="6858000"/>
+            <a:ext cx="12191695" cy="6858000"/>
           </a:xfrm>
           <a:prstGeom prst="rect">
             <a:avLst/>
